--- a/evidence/2026-10-02/run-fair/raw/libreoffice/feature-matrix/measured-3.pptx
+++ b/evidence/2026-10-02/run-fair/raw/libreoffice/feature-matrix/measured-3.pptx
@@ -424,7 +424,7 @@
             <a:pPr indent="0" algn="r">
               <a:buNone/>
             </a:pPr>
-            <a:fld id="{AB00DE08-8085-4E14-B7A2-193442D41219}" type="slidenum">
+            <a:fld id="{90EC1D98-FEC0-4128-9BC4-38BD0C41DFFF}" type="slidenum">
               <a:rPr lang="en-US" sz="1400" b="0" u="none" strike="noStrike">
                 <a:solidFill>
                   <a:srgbClr val="000000"/>
@@ -598,7 +598,7 @@
               </a:lnSpc>
               <a:buNone/>
             </a:pPr>
-            <a:fld id="{03EBF001-E04D-48B8-B911-C6469C7801B7}" type="slidenum">
+            <a:fld id="{ECEDFF75-EC94-4367-8CFE-E3639CEA0FE1}" type="slidenum">
               <a:rPr lang="en-US" sz="1200" b="0" u="none" strike="noStrike">
                 <a:solidFill>
                   <a:srgbClr val="000000"/>
@@ -915,7 +915,7 @@
               </a:lnSpc>
               <a:buNone/>
             </a:pPr>
-            <a:fld id="{24D9FC80-1B6F-42A1-AD5E-2A80C41EC962}" type="slidenum">
+            <a:fld id="{168632AA-0A0F-4915-9281-9F1589441B57}" type="slidenum">
               <a:rPr lang="en-US" sz="1200" b="0" u="none" strike="noStrike">
                 <a:solidFill>
                   <a:schemeClr val="dk1">
@@ -1627,7 +1627,7 @@
               </a:lnSpc>
               <a:buNone/>
             </a:pPr>
-            <a:fld id="{52D44006-AA25-4E88-B0D3-B15B37CF2FA5}" type="slidenum">
+            <a:fld id="{29AD4D30-F81F-405C-B4A1-A39A38B47B5B}" type="slidenum">
               <a:rPr lang="en-US" sz="1200" b="0" u="none" strike="noStrike">
                 <a:solidFill>
                   <a:schemeClr val="dk1">
@@ -2086,7 +2086,7 @@
               </a:lnSpc>
               <a:buNone/>
             </a:pPr>
-            <a:fld id="{E4F1D4E5-A224-4891-AB91-6E8F4F8D0CAA}" type="slidenum">
+            <a:fld id="{DEBF01A7-B380-44CF-9A2C-B4121B586554}" type="slidenum">
               <a:rPr lang="en-US" sz="1200" b="0" u="none" strike="noStrike">
                 <a:solidFill>
                   <a:schemeClr val="dk1">
@@ -2714,7 +2714,7 @@
               </a:lnSpc>
               <a:buNone/>
             </a:pPr>
-            <a:fld id="{511C6163-81F1-4C0B-B63E-3CC479737693}" type="slidenum">
+            <a:fld id="{DCD6E18C-AFCA-48B9-B839-A93B18DB93EE}" type="slidenum">
               <a:rPr lang="en-US" sz="1200" b="0" u="none" strike="noStrike">
                 <a:solidFill>
                   <a:schemeClr val="dk1">
@@ -3342,7 +3342,7 @@
               </a:lnSpc>
               <a:buNone/>
             </a:pPr>
-            <a:fld id="{22BA4A41-E8A2-44C2-A3A7-021B8316A7DC}" type="slidenum">
+            <a:fld id="{1DEC26E3-306A-478A-9CA9-BE251684D9F3}" type="slidenum">
               <a:rPr lang="en-US" sz="1200" b="0" u="none" strike="noStrike">
                 <a:solidFill>
                   <a:schemeClr val="dk1">
@@ -3970,7 +3970,7 @@
               </a:lnSpc>
               <a:buNone/>
             </a:pPr>
-            <a:fld id="{D0774D3B-56EC-4BB0-8291-1A7999C46C77}" type="slidenum">
+            <a:fld id="{5A3CBDFC-B2C4-4251-9C31-56FF023CEF02}" type="slidenum">
               <a:rPr lang="en-US" sz="1200" b="0" u="none" strike="noStrike">
                 <a:solidFill>
                   <a:schemeClr val="dk1">
@@ -4382,7 +4382,7 @@
               </a:lnSpc>
               <a:buNone/>
             </a:pPr>
-            <a:fld id="{FACC225E-9DEB-4807-A930-85D7D45FBAFA}" type="slidenum">
+            <a:fld id="{B4F19D93-8655-44A1-8D3B-B965FD14CDC0}" type="slidenum">
               <a:rPr lang="en-US" sz="1200" b="0" u="none" strike="noStrike">
                 <a:solidFill>
                   <a:schemeClr val="dk1">
@@ -5316,7 +5316,7 @@
               </a:lnSpc>
               <a:buNone/>
             </a:pPr>
-            <a:fld id="{13C489A0-A5AC-4536-B924-88055323F503}" type="slidenum">
+            <a:fld id="{0D1BF292-C151-4AB5-A12A-145CA13BBEC8}" type="slidenum">
               <a:rPr lang="en-US" sz="1200" b="0" u="none" strike="noStrike">
                 <a:solidFill>
                   <a:schemeClr val="dk1">
@@ -6478,7 +6478,7 @@
               </a:lnSpc>
               <a:buNone/>
             </a:pPr>
-            <a:fld id="{AB7ECAC7-E98E-414F-B55F-0540B2E592BB}" type="slidenum">
+            <a:fld id="{CE12B3EF-F4C5-4630-84BC-8512786AC411}" type="slidenum">
               <a:rPr lang="en-US" sz="1200" b="0" u="none" strike="noStrike">
                 <a:solidFill>
                   <a:schemeClr val="dk1">
@@ -6800,7 +6800,7 @@
               </a:lnSpc>
               <a:buNone/>
             </a:pPr>
-            <a:fld id="{C7E6B6CB-7DE8-4CBE-AFBD-863E5D687A98}" type="slidenum">
+            <a:fld id="{4F574B68-FE4B-47CE-AB8B-C12793A86894}" type="slidenum">
               <a:rPr lang="en-US" sz="1200" b="0" u="none" strike="noStrike">
                 <a:solidFill>
                   <a:schemeClr val="dk1">
@@ -7050,7 +7050,7 @@
               </a:lnSpc>
               <a:buNone/>
             </a:pPr>
-            <a:fld id="{EDBB5D85-C6F2-4150-AA96-F2FF51068ED3}" type="slidenum">
+            <a:fld id="{B015EAF4-E52F-468C-AE34-555FB6684C99}" type="slidenum">
               <a:rPr lang="en-US" sz="1200" b="0" u="none" strike="noStrike">
                 <a:solidFill>
                   <a:schemeClr val="dk1">
